--- a/courseware/202611_DSA_W11_AVL_DisjointSet.pptx
+++ b/courseware/202611_DSA_W11_AVL_DisjointSet.pptx
@@ -15511,7 +15511,7 @@
         </p:nvGraphicFramePr>
         <p:xfrm>
           <a:off x="566928" y="1298448"/>
-          <a:ext cx="11057837" cy="3954780"/>
+          <a:ext cx="11057838" cy="3954780"/>
         </p:xfrm>
         <a:graphic>
           <a:graphicData uri="http://schemas.openxmlformats.org/drawingml/2006/table">
@@ -15520,10 +15520,10 @@
                 <a:tableStyleId>{5C22544A-7EE6-4342-B048-85BDC9FD1C3A}</a:tableStyleId>
               </a:tblPr>
               <a:tblGrid>
-                <a:gridCol w="1212365"/>
-                <a:gridCol w="4583007"/>
-                <a:gridCol w="2491344"/>
-                <a:gridCol w="2771121"/>
+                <a:gridCol w="1361655"/>
+                <a:gridCol w="3785701"/>
+                <a:gridCol w="2798127"/>
+                <a:gridCol w="3112355"/>
               </a:tblGrid>
               <a:tr h="439420">
                 <a:tc>
@@ -16688,7 +16688,7 @@
                           <a:latin typeface="Segoe UI"/>
                           <a:ea typeface="微软雅黑"/>
                         </a:rPr>
-                        <a:t>Find them, Catch them / 账户合并</a:t>
+                        <a:t>发现它，抓住它 / 账户合并</a:t>
                       </a:r>
                     </a:p>
                   </a:txBody>
